--- a/m2/diapositivos/sessao-05-m2-f10.pptx
+++ b/m2/diapositivos/sessao-05-m2-f10.pptx
@@ -2587,9 +2587,6 @@
               <a:lnSpc>
                 <a:spcPct val="120000"/>
               </a:lnSpc>
-              <a:spcAft>
-                <a:spcPts val="1000"/>
-              </a:spcAft>
               <a:buNone/>
             </a:pPr>
             <a:r>
@@ -2601,22 +2598,16 @@
                 <a:ea typeface="Georgia" pitchFamily="34" charset="-122"/>
                 <a:cs typeface="Georgia" pitchFamily="34" charset="-120"/>
               </a:rPr>
-              <a:t>Escreve no caderno a data, o local e a companhia.</a:t>
-            </a:r>
-            <a:endParaRPr lang="en-US" sz="2300" dirty="0"/>
-          </a:p>
-          <a:p>
+              <a:t>Escreve no caderno a data, o local e a companhia. Durante o espetáculo </a:t>
+            </a:r>
             <a:pPr indent="0" marL="0">
               <a:lnSpc>
                 <a:spcPct val="120000"/>
               </a:lnSpc>
-              <a:spcAft>
-                <a:spcPts val="1000"/>
-              </a:spcAft>
-              <a:buNone/>
-            </a:pPr>
-            <a:r>
-              <a:rPr lang="en-US" sz="2300" dirty="0">
+              <a:buNone/>
+            </a:pPr>
+            <a:r>
+              <a:rPr lang="en-US" sz="2300" b="1" dirty="0">
                 <a:solidFill>
                   <a:srgbClr val="F2F0EA"/>
                 </a:solidFill>
@@ -2624,7 +2615,92 @@
                 <a:ea typeface="Georgia" pitchFamily="34" charset="-122"/>
                 <a:cs typeface="Georgia" pitchFamily="34" charset="-120"/>
               </a:rPr>
-              <a:t>Durante o espetáculo não se usa telemóvel: leva o caderno e um lápis e escreve só no intervalo ou no fim. Escolhe já uma personagem e uma cena para observar com atenção.</a:t>
+              <a:t>não se usa telemóvel</a:t>
+            </a:r>
+            <a:pPr indent="0" marL="0">
+              <a:lnSpc>
+                <a:spcPct val="120000"/>
+              </a:lnSpc>
+              <a:buNone/>
+            </a:pPr>
+            <a:r>
+              <a:rPr lang="en-US" sz="2300" dirty="0">
+                <a:solidFill>
+                  <a:srgbClr val="F2F0EA"/>
+                </a:solidFill>
+                <a:latin typeface="Georgia" pitchFamily="34" charset="0"/>
+                <a:ea typeface="Georgia" pitchFamily="34" charset="-122"/>
+                <a:cs typeface="Georgia" pitchFamily="34" charset="-120"/>
+              </a:rPr>
+              <a:t>: leva o caderno e um lápis e escreve só no intervalo ou no fim. Escolhe já </a:t>
+            </a:r>
+            <a:pPr indent="0" marL="0">
+              <a:lnSpc>
+                <a:spcPct val="120000"/>
+              </a:lnSpc>
+              <a:buNone/>
+            </a:pPr>
+            <a:r>
+              <a:rPr lang="en-US" sz="2300" b="1" dirty="0">
+                <a:solidFill>
+                  <a:srgbClr val="F2F0EA"/>
+                </a:solidFill>
+                <a:latin typeface="Georgia" pitchFamily="34" charset="0"/>
+                <a:ea typeface="Georgia" pitchFamily="34" charset="-122"/>
+                <a:cs typeface="Georgia" pitchFamily="34" charset="-120"/>
+              </a:rPr>
+              <a:t>uma personagem</a:t>
+            </a:r>
+            <a:pPr indent="0" marL="0">
+              <a:lnSpc>
+                <a:spcPct val="120000"/>
+              </a:lnSpc>
+              <a:buNone/>
+            </a:pPr>
+            <a:r>
+              <a:rPr lang="en-US" sz="2300" dirty="0">
+                <a:solidFill>
+                  <a:srgbClr val="F2F0EA"/>
+                </a:solidFill>
+                <a:latin typeface="Georgia" pitchFamily="34" charset="0"/>
+                <a:ea typeface="Georgia" pitchFamily="34" charset="-122"/>
+                <a:cs typeface="Georgia" pitchFamily="34" charset="-120"/>
+              </a:rPr>
+              <a:t> e </a:t>
+            </a:r>
+            <a:pPr indent="0" marL="0">
+              <a:lnSpc>
+                <a:spcPct val="120000"/>
+              </a:lnSpc>
+              <a:buNone/>
+            </a:pPr>
+            <a:r>
+              <a:rPr lang="en-US" sz="2300" b="1" dirty="0">
+                <a:solidFill>
+                  <a:srgbClr val="F2F0EA"/>
+                </a:solidFill>
+                <a:latin typeface="Georgia" pitchFamily="34" charset="0"/>
+                <a:ea typeface="Georgia" pitchFamily="34" charset="-122"/>
+                <a:cs typeface="Georgia" pitchFamily="34" charset="-120"/>
+              </a:rPr>
+              <a:t>uma cena</a:t>
+            </a:r>
+            <a:pPr indent="0" marL="0">
+              <a:lnSpc>
+                <a:spcPct val="120000"/>
+              </a:lnSpc>
+              <a:buNone/>
+            </a:pPr>
+            <a:r>
+              <a:rPr lang="en-US" sz="2300" dirty="0">
+                <a:solidFill>
+                  <a:srgbClr val="F2F0EA"/>
+                </a:solidFill>
+                <a:latin typeface="Georgia" pitchFamily="34" charset="0"/>
+                <a:ea typeface="Georgia" pitchFamily="34" charset="-122"/>
+                <a:cs typeface="Georgia" pitchFamily="34" charset="-120"/>
+              </a:rPr>
+              <a:t> para observar com atenção.</a:t>
             </a:r>
             <a:endParaRPr lang="en-US" sz="2300" dirty="0"/>
           </a:p>
@@ -3247,7 +3323,41 @@
                 <a:ea typeface="Arial" pitchFamily="34" charset="-122"/>
                 <a:cs typeface="Arial" pitchFamily="34" charset="-120"/>
               </a:rPr>
-              <a:t>Vais escrever a reportagem da ida ao teatro, com título, lead, citação identificada e fecho, e a frase de abertura da tua apreciação crítica.</a:t>
+              <a:t>Vais escrever a reportagem da ida ao teatro, com título, </a:t>
+            </a:r>
+            <a:pPr indent="0" marL="0">
+              <a:lnSpc>
+                <a:spcPct val="105000"/>
+              </a:lnSpc>
+              <a:buNone/>
+            </a:pPr>
+            <a:r>
+              <a:rPr lang="en-US" sz="2200" i="1" dirty="0">
+                <a:solidFill>
+                  <a:srgbClr val="F2F0EA"/>
+                </a:solidFill>
+                <a:latin typeface="Arial" pitchFamily="34" charset="0"/>
+                <a:ea typeface="Arial" pitchFamily="34" charset="-122"/>
+                <a:cs typeface="Arial" pitchFamily="34" charset="-120"/>
+              </a:rPr>
+              <a:t>lead</a:t>
+            </a:r>
+            <a:pPr indent="0" marL="0">
+              <a:lnSpc>
+                <a:spcPct val="105000"/>
+              </a:lnSpc>
+              <a:buNone/>
+            </a:pPr>
+            <a:r>
+              <a:rPr lang="en-US" sz="2200" dirty="0">
+                <a:solidFill>
+                  <a:srgbClr val="F2F0EA"/>
+                </a:solidFill>
+                <a:latin typeface="Arial" pitchFamily="34" charset="0"/>
+                <a:ea typeface="Arial" pitchFamily="34" charset="-122"/>
+                <a:cs typeface="Arial" pitchFamily="34" charset="-120"/>
+              </a:rPr>
+              <a:t>, citação identificada e fecho, e a frase de abertura da tua apreciação crítica.</a:t>
             </a:r>
             <a:endParaRPr lang="en-US" sz="2200" dirty="0"/>
           </a:p>
@@ -4786,7 +4896,211 @@
                 <a:ea typeface="Georgia" pitchFamily="34" charset="-122"/>
                 <a:cs typeface="Georgia" pitchFamily="34" charset="-120"/>
               </a:rPr>
-              <a:t>A reportagem conta um acontecimento a que o repórter assistiu. Tem título, um lead (a primeira frase responde a quem, o quê, onde, quando), um corpo com o que se viu e ouviu, pelo menos uma citação de alguém que lá estava (com o nome ou a função) e um fecho que deixe uma imagem. Escreve-se na terceira pessoa; a opinião fica para a apreciação crítica.</a:t>
+              <a:t>A </a:t>
+            </a:r>
+            <a:pPr indent="0" marL="0">
+              <a:lnSpc>
+                <a:spcPct val="120000"/>
+              </a:lnSpc>
+              <a:buNone/>
+            </a:pPr>
+            <a:r>
+              <a:rPr lang="en-US" sz="2300" b="1" dirty="0">
+                <a:solidFill>
+                  <a:srgbClr val="F2F0EA"/>
+                </a:solidFill>
+                <a:latin typeface="Georgia" pitchFamily="34" charset="0"/>
+                <a:ea typeface="Georgia" pitchFamily="34" charset="-122"/>
+                <a:cs typeface="Georgia" pitchFamily="34" charset="-120"/>
+              </a:rPr>
+              <a:t>reportagem</a:t>
+            </a:r>
+            <a:pPr indent="0" marL="0">
+              <a:lnSpc>
+                <a:spcPct val="120000"/>
+              </a:lnSpc>
+              <a:buNone/>
+            </a:pPr>
+            <a:r>
+              <a:rPr lang="en-US" sz="2300" dirty="0">
+                <a:solidFill>
+                  <a:srgbClr val="F2F0EA"/>
+                </a:solidFill>
+                <a:latin typeface="Georgia" pitchFamily="34" charset="0"/>
+                <a:ea typeface="Georgia" pitchFamily="34" charset="-122"/>
+                <a:cs typeface="Georgia" pitchFamily="34" charset="-120"/>
+              </a:rPr>
+              <a:t> conta um acontecimento a que o repórter assistiu. Tem </a:t>
+            </a:r>
+            <a:pPr indent="0" marL="0">
+              <a:lnSpc>
+                <a:spcPct val="120000"/>
+              </a:lnSpc>
+              <a:buNone/>
+            </a:pPr>
+            <a:r>
+              <a:rPr lang="en-US" sz="2300" b="1" dirty="0">
+                <a:solidFill>
+                  <a:srgbClr val="F2F0EA"/>
+                </a:solidFill>
+                <a:latin typeface="Georgia" pitchFamily="34" charset="0"/>
+                <a:ea typeface="Georgia" pitchFamily="34" charset="-122"/>
+                <a:cs typeface="Georgia" pitchFamily="34" charset="-120"/>
+              </a:rPr>
+              <a:t>título</a:t>
+            </a:r>
+            <a:pPr indent="0" marL="0">
+              <a:lnSpc>
+                <a:spcPct val="120000"/>
+              </a:lnSpc>
+              <a:buNone/>
+            </a:pPr>
+            <a:r>
+              <a:rPr lang="en-US" sz="2300" dirty="0">
+                <a:solidFill>
+                  <a:srgbClr val="F2F0EA"/>
+                </a:solidFill>
+                <a:latin typeface="Georgia" pitchFamily="34" charset="0"/>
+                <a:ea typeface="Georgia" pitchFamily="34" charset="-122"/>
+                <a:cs typeface="Georgia" pitchFamily="34" charset="-120"/>
+              </a:rPr>
+              <a:t>, um </a:t>
+            </a:r>
+            <a:pPr indent="0" marL="0">
+              <a:lnSpc>
+                <a:spcPct val="120000"/>
+              </a:lnSpc>
+              <a:buNone/>
+            </a:pPr>
+            <a:r>
+              <a:rPr lang="en-US" sz="2300" b="1" dirty="0">
+                <a:solidFill>
+                  <a:srgbClr val="F2F0EA"/>
+                </a:solidFill>
+                <a:latin typeface="Georgia" pitchFamily="34" charset="0"/>
+                <a:ea typeface="Georgia" pitchFamily="34" charset="-122"/>
+                <a:cs typeface="Georgia" pitchFamily="34" charset="-120"/>
+              </a:rPr>
+              <a:t>lead</a:t>
+            </a:r>
+            <a:pPr indent="0" marL="0">
+              <a:lnSpc>
+                <a:spcPct val="120000"/>
+              </a:lnSpc>
+              <a:buNone/>
+            </a:pPr>
+            <a:r>
+              <a:rPr lang="en-US" sz="2300" dirty="0">
+                <a:solidFill>
+                  <a:srgbClr val="F2F0EA"/>
+                </a:solidFill>
+                <a:latin typeface="Georgia" pitchFamily="34" charset="0"/>
+                <a:ea typeface="Georgia" pitchFamily="34" charset="-122"/>
+                <a:cs typeface="Georgia" pitchFamily="34" charset="-120"/>
+              </a:rPr>
+              <a:t> (a primeira frase responde a quem, o quê, onde, quando), um </a:t>
+            </a:r>
+            <a:pPr indent="0" marL="0">
+              <a:lnSpc>
+                <a:spcPct val="120000"/>
+              </a:lnSpc>
+              <a:buNone/>
+            </a:pPr>
+            <a:r>
+              <a:rPr lang="en-US" sz="2300" b="1" dirty="0">
+                <a:solidFill>
+                  <a:srgbClr val="F2F0EA"/>
+                </a:solidFill>
+                <a:latin typeface="Georgia" pitchFamily="34" charset="0"/>
+                <a:ea typeface="Georgia" pitchFamily="34" charset="-122"/>
+                <a:cs typeface="Georgia" pitchFamily="34" charset="-120"/>
+              </a:rPr>
+              <a:t>corpo</a:t>
+            </a:r>
+            <a:pPr indent="0" marL="0">
+              <a:lnSpc>
+                <a:spcPct val="120000"/>
+              </a:lnSpc>
+              <a:buNone/>
+            </a:pPr>
+            <a:r>
+              <a:rPr lang="en-US" sz="2300" dirty="0">
+                <a:solidFill>
+                  <a:srgbClr val="F2F0EA"/>
+                </a:solidFill>
+                <a:latin typeface="Georgia" pitchFamily="34" charset="0"/>
+                <a:ea typeface="Georgia" pitchFamily="34" charset="-122"/>
+                <a:cs typeface="Georgia" pitchFamily="34" charset="-120"/>
+              </a:rPr>
+              <a:t> com o que se viu e ouviu, pelo menos uma </a:t>
+            </a:r>
+            <a:pPr indent="0" marL="0">
+              <a:lnSpc>
+                <a:spcPct val="120000"/>
+              </a:lnSpc>
+              <a:buNone/>
+            </a:pPr>
+            <a:r>
+              <a:rPr lang="en-US" sz="2300" b="1" dirty="0">
+                <a:solidFill>
+                  <a:srgbClr val="F2F0EA"/>
+                </a:solidFill>
+                <a:latin typeface="Georgia" pitchFamily="34" charset="0"/>
+                <a:ea typeface="Georgia" pitchFamily="34" charset="-122"/>
+                <a:cs typeface="Georgia" pitchFamily="34" charset="-120"/>
+              </a:rPr>
+              <a:t>citação</a:t>
+            </a:r>
+            <a:pPr indent="0" marL="0">
+              <a:lnSpc>
+                <a:spcPct val="120000"/>
+              </a:lnSpc>
+              <a:buNone/>
+            </a:pPr>
+            <a:r>
+              <a:rPr lang="en-US" sz="2300" dirty="0">
+                <a:solidFill>
+                  <a:srgbClr val="F2F0EA"/>
+                </a:solidFill>
+                <a:latin typeface="Georgia" pitchFamily="34" charset="0"/>
+                <a:ea typeface="Georgia" pitchFamily="34" charset="-122"/>
+                <a:cs typeface="Georgia" pitchFamily="34" charset="-120"/>
+              </a:rPr>
+              <a:t> de alguém que lá estava (com o nome ou a função) e um </a:t>
+            </a:r>
+            <a:pPr indent="0" marL="0">
+              <a:lnSpc>
+                <a:spcPct val="120000"/>
+              </a:lnSpc>
+              <a:buNone/>
+            </a:pPr>
+            <a:r>
+              <a:rPr lang="en-US" sz="2300" b="1" dirty="0">
+                <a:solidFill>
+                  <a:srgbClr val="F2F0EA"/>
+                </a:solidFill>
+                <a:latin typeface="Georgia" pitchFamily="34" charset="0"/>
+                <a:ea typeface="Georgia" pitchFamily="34" charset="-122"/>
+                <a:cs typeface="Georgia" pitchFamily="34" charset="-120"/>
+              </a:rPr>
+              <a:t>fecho</a:t>
+            </a:r>
+            <a:pPr indent="0" marL="0">
+              <a:lnSpc>
+                <a:spcPct val="120000"/>
+              </a:lnSpc>
+              <a:buNone/>
+            </a:pPr>
+            <a:r>
+              <a:rPr lang="en-US" sz="2300" dirty="0">
+                <a:solidFill>
+                  <a:srgbClr val="F2F0EA"/>
+                </a:solidFill>
+                <a:latin typeface="Georgia" pitchFamily="34" charset="0"/>
+                <a:ea typeface="Georgia" pitchFamily="34" charset="-122"/>
+                <a:cs typeface="Georgia" pitchFamily="34" charset="-120"/>
+              </a:rPr>
+              <a:t> que deixe uma imagem. Escreve-se na terceira pessoa; a opinião fica para a apreciação crítica.</a:t>
             </a:r>
             <a:endParaRPr lang="en-US" sz="2300" dirty="0"/>
           </a:p>
@@ -6619,7 +6933,41 @@
                 <a:ea typeface="Arial" pitchFamily="34" charset="-122"/>
                 <a:cs typeface="Arial" pitchFamily="34" charset="-120"/>
               </a:rPr>
-              <a:t>A reportagem conta a ida ao teatro na terceira pessoa: título, lead com quem, o quê, onde e quando, corpo com duas coisas vistas e uma ouvida entre aspas, fecho com uma imagem.</a:t>
+              <a:t>A reportagem conta a ida ao teatro na terceira pessoa: título, </a:t>
+            </a:r>
+            <a:pPr indent="0" marL="0">
+              <a:lnSpc>
+                <a:spcPct val="105000"/>
+              </a:lnSpc>
+              <a:buNone/>
+            </a:pPr>
+            <a:r>
+              <a:rPr lang="en-US" sz="2000" i="1" dirty="0">
+                <a:solidFill>
+                  <a:srgbClr val="F2F0EA"/>
+                </a:solidFill>
+                <a:latin typeface="Arial" pitchFamily="34" charset="0"/>
+                <a:ea typeface="Arial" pitchFamily="34" charset="-122"/>
+                <a:cs typeface="Arial" pitchFamily="34" charset="-120"/>
+              </a:rPr>
+              <a:t>lead</a:t>
+            </a:r>
+            <a:pPr indent="0" marL="0">
+              <a:lnSpc>
+                <a:spcPct val="105000"/>
+              </a:lnSpc>
+              <a:buNone/>
+            </a:pPr>
+            <a:r>
+              <a:rPr lang="en-US" sz="2000" dirty="0">
+                <a:solidFill>
+                  <a:srgbClr val="F2F0EA"/>
+                </a:solidFill>
+                <a:latin typeface="Arial" pitchFamily="34" charset="0"/>
+                <a:ea typeface="Arial" pitchFamily="34" charset="-122"/>
+                <a:cs typeface="Arial" pitchFamily="34" charset="-120"/>
+              </a:rPr>
+              <a:t> com quem, o quê, onde e quando, corpo com duas coisas vistas e uma ouvida entre aspas, fecho com uma imagem.</a:t>
             </a:r>
             <a:endParaRPr lang="en-US" sz="2000" dirty="0"/>
           </a:p>
